--- a/docs/presentaciones/classes/clase-141-encoder-decoder-para-traduccion-presentacion.pptx
+++ b/docs/presentaciones/classes/clase-141-encoder-decoder-para-traduccion-presentacion.pptx
@@ -4910,7 +4910,254 @@
                 </a:solidFill>
                 <a:latin typeface="Courier New"/>
               </a:rPr>
-              <a:t># Imports y configuración inicial</a:t>
+              <a:t>import numpy as np</a:t>
+            </a:r>
+          </a:p>
+          <a:p>
+            <a:pPr>
+              <a:defRPr sz="1200" b="0">
+                <a:solidFill>
+                  <a:srgbClr val="F8FAFC"/>
+                </a:solidFill>
+                <a:latin typeface="Courier New"/>
+              </a:defRPr>
+            </a:pPr>
+            <a:r>
+              <a:rPr sz="1200" b="0">
+                <a:solidFill>
+                  <a:srgbClr val="F8FAFC"/>
+                </a:solidFill>
+                <a:latin typeface="Courier New"/>
+              </a:rPr>
+              <a:t>from tensorflow import keras</a:t>
+            </a:r>
+          </a:p>
+          <a:p>
+            <a:pPr>
+              <a:defRPr sz="1200" b="0">
+                <a:solidFill>
+                  <a:srgbClr val="F8FAFC"/>
+                </a:solidFill>
+                <a:latin typeface="Courier New"/>
+              </a:defRPr>
+            </a:pPr>
+            <a:r>
+              <a:rPr sz="1200" b="0">
+                <a:solidFill>
+                  <a:srgbClr val="F8FAFC"/>
+                </a:solidFill>
+                <a:latin typeface="Courier New"/>
+              </a:rPr>
+              <a:t>from tensorflow.keras import layers</a:t>
+            </a:r>
+          </a:p>
+          <a:p>
+            <a:pPr>
+              <a:defRPr sz="1200" b="0">
+                <a:solidFill>
+                  <a:srgbClr val="F8FAFC"/>
+                </a:solidFill>
+                <a:latin typeface="Courier New"/>
+              </a:defRPr>
+            </a:pPr>
+            <a:r>
+              <a:rPr sz="1200" b="0">
+                <a:solidFill>
+                  <a:srgbClr val="F8FAFC"/>
+                </a:solidFill>
+                <a:latin typeface="Courier New"/>
+              </a:rPr>
+              <a:t>keras.utils.set_random_seed(42)</a:t>
+            </a:r>
+          </a:p>
+          <a:p>
+            <a:pPr>
+              <a:defRPr sz="1200" b="0">
+                <a:solidFill>
+                  <a:srgbClr val="F8FAFC"/>
+                </a:solidFill>
+                <a:latin typeface="Courier New"/>
+              </a:defRPr>
+            </a:pPr>
+            <a:r>
+              <a:rPr sz="1200" b="0">
+                <a:solidFill>
+                  <a:srgbClr val="F8FAFC"/>
+                </a:solidFill>
+                <a:latin typeface="Courier New"/>
+              </a:rPr>
+              <a:t>pares = [</a:t>
+            </a:r>
+          </a:p>
+          <a:p>
+            <a:pPr>
+              <a:defRPr sz="1200" b="0">
+                <a:solidFill>
+                  <a:srgbClr val="F8FAFC"/>
+                </a:solidFill>
+                <a:latin typeface="Courier New"/>
+              </a:defRPr>
+            </a:pPr>
+            <a:r>
+              <a:rPr sz="1200" b="0">
+                <a:solidFill>
+                  <a:srgbClr val="F8FAFC"/>
+                </a:solidFill>
+                <a:latin typeface="Courier New"/>
+              </a:rPr>
+              <a:t>    ("hello", "hola"),</a:t>
+            </a:r>
+          </a:p>
+          <a:p>
+            <a:pPr>
+              <a:defRPr sz="1200" b="0">
+                <a:solidFill>
+                  <a:srgbClr val="F8FAFC"/>
+                </a:solidFill>
+                <a:latin typeface="Courier New"/>
+              </a:defRPr>
+            </a:pPr>
+            <a:r>
+              <a:rPr sz="1200" b="0">
+                <a:solidFill>
+                  <a:srgbClr val="F8FAFC"/>
+                </a:solidFill>
+                <a:latin typeface="Courier New"/>
+              </a:rPr>
+              <a:t>    ("good morning", "buenos dias"),</a:t>
+            </a:r>
+          </a:p>
+          <a:p>
+            <a:pPr>
+              <a:defRPr sz="1200" b="0">
+                <a:solidFill>
+                  <a:srgbClr val="F8FAFC"/>
+                </a:solidFill>
+                <a:latin typeface="Courier New"/>
+              </a:defRPr>
+            </a:pPr>
+            <a:r>
+              <a:rPr sz="1200" b="0">
+                <a:solidFill>
+                  <a:srgbClr val="F8FAFC"/>
+                </a:solidFill>
+                <a:latin typeface="Courier New"/>
+              </a:rPr>
+              <a:t>    ("thank you", "gracias"),</a:t>
+            </a:r>
+          </a:p>
+          <a:p>
+            <a:pPr>
+              <a:defRPr sz="1200" b="0">
+                <a:solidFill>
+                  <a:srgbClr val="F8FAFC"/>
+                </a:solidFill>
+                <a:latin typeface="Courier New"/>
+              </a:defRPr>
+            </a:pPr>
+            <a:r>
+              <a:rPr sz="1200" b="0">
+                <a:solidFill>
+                  <a:srgbClr val="F8FAFC"/>
+                </a:solidFill>
+                <a:latin typeface="Courier New"/>
+              </a:rPr>
+              <a:t>    ("how are you", "como estas"),</a:t>
+            </a:r>
+          </a:p>
+          <a:p>
+            <a:pPr>
+              <a:defRPr sz="1200" b="0">
+                <a:solidFill>
+                  <a:srgbClr val="F8FAFC"/>
+                </a:solidFill>
+                <a:latin typeface="Courier New"/>
+              </a:defRPr>
+            </a:pPr>
+            <a:r>
+              <a:rPr sz="1200" b="0">
+                <a:solidFill>
+                  <a:srgbClr val="F8FAFC"/>
+                </a:solidFill>
+                <a:latin typeface="Courier New"/>
+              </a:rPr>
+              <a:t>    ("see you later", "hasta luego"),</a:t>
+            </a:r>
+          </a:p>
+          <a:p>
+            <a:pPr>
+              <a:defRPr sz="1200" b="0">
+                <a:solidFill>
+                  <a:srgbClr val="F8FAFC"/>
+                </a:solidFill>
+                <a:latin typeface="Courier New"/>
+              </a:defRPr>
+            </a:pPr>
+            <a:r>
+              <a:rPr sz="1200" b="0">
+                <a:solidFill>
+                  <a:srgbClr val="F8FAFC"/>
+                </a:solidFill>
+                <a:latin typeface="Courier New"/>
+              </a:rPr>
+              <a:t>]</a:t>
+            </a:r>
+          </a:p>
+          <a:p>
+            <a:pPr>
+              <a:defRPr sz="1200" b="0">
+                <a:solidFill>
+                  <a:srgbClr val="F8FAFC"/>
+                </a:solidFill>
+                <a:latin typeface="Courier New"/>
+              </a:defRPr>
+            </a:pPr>
+            <a:r>
+              <a:rPr sz="1200" b="0">
+                <a:solidFill>
+                  <a:srgbClr val="F8FAFC"/>
+                </a:solidFill>
+                <a:latin typeface="Courier New"/>
+              </a:rPr>
+              <a:t>fuente = [s for s, _ in pares]</a:t>
+            </a:r>
+          </a:p>
+          <a:p>
+            <a:pPr>
+              <a:defRPr sz="1200" b="0">
+                <a:solidFill>
+                  <a:srgbClr val="F8FAFC"/>
+                </a:solidFill>
+                <a:latin typeface="Courier New"/>
+              </a:defRPr>
+            </a:pPr>
+            <a:r>
+              <a:rPr sz="1200" b="0">
+                <a:solidFill>
+                  <a:srgbClr val="F8FAFC"/>
+                </a:solidFill>
+                <a:latin typeface="Courier New"/>
+              </a:rPr>
+              <a:t>destino = ["[start] " + t + " [end]" for _, t in pares]   # marcadores de inicio/fin</a:t>
+            </a:r>
+          </a:p>
+          <a:p>
+            <a:pPr>
+              <a:defRPr sz="1200" b="0">
+                <a:solidFill>
+                  <a:srgbClr val="F8FAFC"/>
+                </a:solidFill>
+                <a:latin typeface="Courier New"/>
+              </a:defRPr>
+            </a:pPr>
+            <a:r>
+              <a:rPr sz="1200" b="0">
+                <a:solidFill>
+                  <a:srgbClr val="F8FAFC"/>
+                </a:solidFill>
+                <a:latin typeface="Courier New"/>
+              </a:rPr>
+              <a:t>print(destino[0])</a:t>
             </a:r>
           </a:p>
         </p:txBody>

--- a/docs/presentaciones/classes/clase-141-encoder-decoder-para-traduccion-presentacion.pptx
+++ b/docs/presentaciones/classes/clase-141-encoder-decoder-para-traduccion-presentacion.pptx
@@ -3272,7 +3272,7 @@
                 </a:solidFill>
                 <a:latin typeface="Segoe UI"/>
               </a:rPr>
-              <a:t>Parte: 2 — Deep Learning · Fuente: Géron, cap. 16 § Encoder–Decoder Network for Neural Machine Translation.  Duración estimada: 80 min.</a:t>
+              <a:t>Parte: 2 — Deep Learning · Fuente: Géron, cap. 16 § Encoder–Decoder Network for Neural Machine Translation.  Duración estimada: 80 min. · Nivel: Avanzado</a:t>
             </a:r>
           </a:p>
         </p:txBody>
@@ -3581,7 +3581,7 @@
                 </a:solidFill>
                 <a:latin typeface="Segoe UI"/>
               </a:rPr>
-              <a:t>Parte: 2 — Deep Learning · Fuente: Géron, cap. 16 § Encoder–Decoder Network for Neural Machine Translation.  Duración estimada: 80 min.</a:t>
+              <a:t>Parte: 2 — Deep Learning · Fuente: Géron, cap. 16 § Encoder–Decoder Network for Neural Machine Translation.  Duración estimada: 80 min. · Nivel: Avanzado</a:t>
             </a:r>
           </a:p>
         </p:txBody>
